--- a/Architecture.pptx
+++ b/Architecture.pptx
@@ -252,7 +252,7 @@
           <a:p>
             <a:fld id="{46C003B6-BCEA-46F3-841E-7B3EC6052E68}" type="datetimeFigureOut">
               <a:rPr lang="en-BE" smtClean="0"/>
-              <a:t>23/05/2022</a:t>
+              <a:t>01/02/2023</a:t>
             </a:fld>
             <a:endParaRPr lang="en-BE"/>
           </a:p>
@@ -5554,7 +5554,7 @@
             <a:fld id="{B61BEF0D-F0BB-DE4B-95CE-6DB70DBA9567}" type="datetimeFigureOut">
               <a:rPr lang="en-US" dirty="0"/>
               <a:pPr/>
-              <a:t>5/23/2022</a:t>
+              <a:t>2/1/2023</a:t>
             </a:fld>
             <a:endParaRPr lang="en-US" dirty="0"/>
           </a:p>
@@ -5842,7 +5842,7 @@
             <a:fld id="{B61BEF0D-F0BB-DE4B-95CE-6DB70DBA9567}" type="datetimeFigureOut">
               <a:rPr lang="en-US" dirty="0"/>
               <a:pPr/>
-              <a:t>5/23/2022</a:t>
+              <a:t>2/1/2023</a:t>
             </a:fld>
             <a:endParaRPr lang="en-US" dirty="0"/>
           </a:p>
@@ -6087,7 +6087,7 @@
             <a:fld id="{B61BEF0D-F0BB-DE4B-95CE-6DB70DBA9567}" type="datetimeFigureOut">
               <a:rPr lang="en-US" dirty="0"/>
               <a:pPr/>
-              <a:t>5/23/2022</a:t>
+              <a:t>2/1/2023</a:t>
             </a:fld>
             <a:endParaRPr lang="en-US" dirty="0"/>
           </a:p>
@@ -6620,7 +6620,7 @@
             <a:fld id="{B61BEF0D-F0BB-DE4B-95CE-6DB70DBA9567}" type="datetimeFigureOut">
               <a:rPr lang="en-US" dirty="0"/>
               <a:pPr/>
-              <a:t>5/23/2022</a:t>
+              <a:t>2/1/2023</a:t>
             </a:fld>
             <a:endParaRPr lang="en-US" dirty="0"/>
           </a:p>
@@ -6865,7 +6865,7 @@
             <a:fld id="{B61BEF0D-F0BB-DE4B-95CE-6DB70DBA9567}" type="datetimeFigureOut">
               <a:rPr lang="en-US" dirty="0"/>
               <a:pPr/>
-              <a:t>5/23/2022</a:t>
+              <a:t>2/1/2023</a:t>
             </a:fld>
             <a:endParaRPr lang="en-US" dirty="0"/>
           </a:p>
@@ -7405,7 +7405,7 @@
             <a:fld id="{B61BEF0D-F0BB-DE4B-95CE-6DB70DBA9567}" type="datetimeFigureOut">
               <a:rPr lang="en-US" dirty="0"/>
               <a:pPr/>
-              <a:t>5/23/2022</a:t>
+              <a:t>2/1/2023</a:t>
             </a:fld>
             <a:endParaRPr lang="en-US" dirty="0"/>
           </a:p>
@@ -7712,7 +7712,7 @@
             <a:fld id="{B61BEF0D-F0BB-DE4B-95CE-6DB70DBA9567}" type="datetimeFigureOut">
               <a:rPr lang="en-US" dirty="0"/>
               <a:pPr/>
-              <a:t>5/23/2022</a:t>
+              <a:t>2/1/2023</a:t>
             </a:fld>
             <a:endParaRPr lang="en-US" dirty="0"/>
           </a:p>
@@ -7884,7 +7884,7 @@
             <a:fld id="{B61BEF0D-F0BB-DE4B-95CE-6DB70DBA9567}" type="datetimeFigureOut">
               <a:rPr lang="en-US" dirty="0"/>
               <a:pPr/>
-              <a:t>5/23/2022</a:t>
+              <a:t>2/1/2023</a:t>
             </a:fld>
             <a:endParaRPr lang="en-US" dirty="0"/>
           </a:p>
@@ -8061,7 +8061,7 @@
             <a:fld id="{B61BEF0D-F0BB-DE4B-95CE-6DB70DBA9567}" type="datetimeFigureOut">
               <a:rPr lang="en-US" dirty="0"/>
               <a:pPr/>
-              <a:t>5/23/2022</a:t>
+              <a:t>2/1/2023</a:t>
             </a:fld>
             <a:endParaRPr lang="en-US" dirty="0"/>
           </a:p>
@@ -8228,7 +8228,7 @@
             <a:fld id="{B61BEF0D-F0BB-DE4B-95CE-6DB70DBA9567}" type="datetimeFigureOut">
               <a:rPr lang="en-US" dirty="0"/>
               <a:pPr/>
-              <a:t>5/23/2022</a:t>
+              <a:t>2/1/2023</a:t>
             </a:fld>
             <a:endParaRPr lang="en-US" dirty="0"/>
           </a:p>
@@ -8471,7 +8471,7 @@
             <a:fld id="{B61BEF0D-F0BB-DE4B-95CE-6DB70DBA9567}" type="datetimeFigureOut">
               <a:rPr lang="en-US" dirty="0"/>
               <a:pPr/>
-              <a:t>5/23/2022</a:t>
+              <a:t>2/1/2023</a:t>
             </a:fld>
             <a:endParaRPr lang="en-US" dirty="0"/>
           </a:p>
@@ -8760,7 +8760,7 @@
             <a:fld id="{B61BEF0D-F0BB-DE4B-95CE-6DB70DBA9567}" type="datetimeFigureOut">
               <a:rPr lang="en-US" dirty="0"/>
               <a:pPr/>
-              <a:t>5/23/2022</a:t>
+              <a:t>2/1/2023</a:t>
             </a:fld>
             <a:endParaRPr lang="en-US" dirty="0"/>
           </a:p>
@@ -9187,7 +9187,7 @@
             <a:fld id="{B61BEF0D-F0BB-DE4B-95CE-6DB70DBA9567}" type="datetimeFigureOut">
               <a:rPr lang="en-US" dirty="0"/>
               <a:pPr/>
-              <a:t>5/23/2022</a:t>
+              <a:t>2/1/2023</a:t>
             </a:fld>
             <a:endParaRPr lang="en-US" dirty="0"/>
           </a:p>
@@ -9307,7 +9307,7 @@
             <a:fld id="{B61BEF0D-F0BB-DE4B-95CE-6DB70DBA9567}" type="datetimeFigureOut">
               <a:rPr lang="en-US" dirty="0"/>
               <a:pPr/>
-              <a:t>5/23/2022</a:t>
+              <a:t>2/1/2023</a:t>
             </a:fld>
             <a:endParaRPr lang="en-US" dirty="0"/>
           </a:p>
@@ -9399,7 +9399,7 @@
             <a:fld id="{B61BEF0D-F0BB-DE4B-95CE-6DB70DBA9567}" type="datetimeFigureOut">
               <a:rPr lang="en-US" dirty="0"/>
               <a:pPr/>
-              <a:t>5/23/2022</a:t>
+              <a:t>2/1/2023</a:t>
             </a:fld>
             <a:endParaRPr lang="en-US" dirty="0"/>
           </a:p>
@@ -9679,7 +9679,7 @@
             <a:fld id="{B61BEF0D-F0BB-DE4B-95CE-6DB70DBA9567}" type="datetimeFigureOut">
               <a:rPr lang="en-US" dirty="0"/>
               <a:pPr/>
-              <a:t>5/23/2022</a:t>
+              <a:t>2/1/2023</a:t>
             </a:fld>
             <a:endParaRPr lang="en-US" dirty="0"/>
           </a:p>
@@ -9967,7 +9967,7 @@
             <a:fld id="{B61BEF0D-F0BB-DE4B-95CE-6DB70DBA9567}" type="datetimeFigureOut">
               <a:rPr lang="en-US" dirty="0"/>
               <a:pPr/>
-              <a:t>5/23/2022</a:t>
+              <a:t>2/1/2023</a:t>
             </a:fld>
             <a:endParaRPr lang="en-US" dirty="0"/>
           </a:p>
@@ -10195,7 +10195,7 @@
             <a:fld id="{B61BEF0D-F0BB-DE4B-95CE-6DB70DBA9567}" type="datetimeFigureOut">
               <a:rPr lang="en-US" dirty="0"/>
               <a:pPr/>
-              <a:t>5/23/2022</a:t>
+              <a:t>2/1/2023</a:t>
             </a:fld>
             <a:endParaRPr lang="en-US" dirty="0"/>
           </a:p>
@@ -10960,6 +10960,254 @@
             <a:r>
               <a:rPr lang="fr-BE" dirty="0"/>
               <a:t>Architecture Track</a:t>
+            </a:r>
+            <a:endParaRPr lang="en-BE" dirty="0"/>
+          </a:p>
+        </p:txBody>
+      </p:sp>
+      <p:sp>
+        <p:nvSpPr>
+          <p:cNvPr id="7" name="Rectangle 6">
+            <a:extLst>
+              <a:ext uri="{FF2B5EF4-FFF2-40B4-BE49-F238E27FC236}">
+                <a16:creationId xmlns:a16="http://schemas.microsoft.com/office/drawing/2014/main" id="{4942C7FE-ECBD-A98B-820A-52CA81736846}"/>
+              </a:ext>
+            </a:extLst>
+          </p:cNvPr>
+          <p:cNvSpPr/>
+          <p:nvPr/>
+        </p:nvSpPr>
+        <p:spPr>
+          <a:xfrm>
+            <a:off x="117913" y="6270021"/>
+            <a:ext cx="1846957" cy="441793"/>
+          </a:xfrm>
+          <a:prstGeom prst="rect">
+            <a:avLst/>
+          </a:prstGeom>
+        </p:spPr>
+        <p:style>
+          <a:lnRef idx="2">
+            <a:schemeClr val="accent6">
+              <a:shade val="50000"/>
+            </a:schemeClr>
+          </a:lnRef>
+          <a:fillRef idx="1">
+            <a:schemeClr val="accent6"/>
+          </a:fillRef>
+          <a:effectRef idx="0">
+            <a:schemeClr val="accent6"/>
+          </a:effectRef>
+          <a:fontRef idx="minor">
+            <a:schemeClr val="lt1"/>
+          </a:fontRef>
+        </p:style>
+        <p:txBody>
+          <a:bodyPr rtlCol="0" anchor="ctr"/>
+          <a:lstStyle/>
+          <a:p>
+            <a:pPr algn="ctr"/>
+            <a:r>
+              <a:rPr lang="fr-BE" dirty="0" err="1"/>
+              <a:t>Theoretical</a:t>
+            </a:r>
+            <a:endParaRPr lang="en-BE" dirty="0"/>
+          </a:p>
+        </p:txBody>
+      </p:sp>
+      <p:sp>
+        <p:nvSpPr>
+          <p:cNvPr id="8" name="TextBox 7">
+            <a:extLst>
+              <a:ext uri="{FF2B5EF4-FFF2-40B4-BE49-F238E27FC236}">
+                <a16:creationId xmlns:a16="http://schemas.microsoft.com/office/drawing/2014/main" id="{E1A6B05B-A362-BC86-67AF-A2651CC9BA5B}"/>
+              </a:ext>
+            </a:extLst>
+          </p:cNvPr>
+          <p:cNvSpPr txBox="1"/>
+          <p:nvPr/>
+        </p:nvSpPr>
+        <p:spPr>
+          <a:xfrm>
+            <a:off x="10946280" y="242773"/>
+            <a:ext cx="1093320" cy="595932"/>
+          </a:xfrm>
+          <a:prstGeom prst="rect">
+            <a:avLst/>
+          </a:prstGeom>
+          <a:noFill/>
+        </p:spPr>
+        <p:txBody>
+          <a:bodyPr wrap="square" rtlCol="0">
+            <a:spAutoFit/>
+          </a:bodyPr>
+          <a:lstStyle/>
+          <a:p>
+            <a:pPr lvl="0">
+              <a:lnSpc>
+                <a:spcPct val="107000"/>
+              </a:lnSpc>
+            </a:pPr>
+            <a:r>
+              <a:rPr lang="en-US" sz="3200" dirty="0">
+                <a:effectLst/>
+                <a:latin typeface="Calibri" panose="020F0502020204030204" pitchFamily="34" charset="0"/>
+                <a:ea typeface="Calibri" panose="020F0502020204030204" pitchFamily="34" charset="0"/>
+                <a:cs typeface="Times New Roman" panose="02020603050405020304" pitchFamily="18" charset="0"/>
+              </a:rPr>
+              <a:t>1h</a:t>
+            </a:r>
+            <a:endParaRPr lang="en-BE" sz="3200" dirty="0">
+              <a:effectLst/>
+              <a:latin typeface="Calibri" panose="020F0502020204030204" pitchFamily="34" charset="0"/>
+              <a:ea typeface="Calibri" panose="020F0502020204030204" pitchFamily="34" charset="0"/>
+              <a:cs typeface="Times New Roman" panose="02020603050405020304" pitchFamily="18" charset="0"/>
+            </a:endParaRPr>
+          </a:p>
+        </p:txBody>
+      </p:sp>
+      <p:pic>
+        <p:nvPicPr>
+          <p:cNvPr id="9" name="Picture 2" descr="Clock PNG, Clock Transparent Background - FreeIconsPNG">
+            <a:extLst>
+              <a:ext uri="{FF2B5EF4-FFF2-40B4-BE49-F238E27FC236}">
+                <a16:creationId xmlns:a16="http://schemas.microsoft.com/office/drawing/2014/main" id="{19C086A5-B09B-3807-EA4D-4AC36DAAC165}"/>
+              </a:ext>
+            </a:extLst>
+          </p:cNvPr>
+          <p:cNvPicPr>
+            <a:picLocks noChangeAspect="1" noChangeArrowheads="1"/>
+          </p:cNvPicPr>
+          <p:nvPr/>
+        </p:nvPicPr>
+        <p:blipFill>
+          <a:blip r:embed="rId4">
+            <a:extLst>
+              <a:ext uri="{28A0092B-C50C-407E-A947-70E740481C1C}">
+                <a14:useLocalDpi xmlns:a14="http://schemas.microsoft.com/office/drawing/2010/main" val="0"/>
+              </a:ext>
+            </a:extLst>
+          </a:blip>
+          <a:srcRect/>
+          <a:stretch>
+            <a:fillRect/>
+          </a:stretch>
+        </p:blipFill>
+        <p:spPr bwMode="auto">
+          <a:xfrm>
+            <a:off x="10053815" y="192891"/>
+            <a:ext cx="736980" cy="736980"/>
+          </a:xfrm>
+          <a:prstGeom prst="rect">
+            <a:avLst/>
+          </a:prstGeom>
+          <a:noFill/>
+          <a:extLst>
+            <a:ext uri="{909E8E84-426E-40DD-AFC4-6F175D3DCCD1}">
+              <a14:hiddenFill xmlns:a14="http://schemas.microsoft.com/office/drawing/2010/main">
+                <a:solidFill>
+                  <a:srgbClr val="FFFFFF"/>
+                </a:solidFill>
+              </a14:hiddenFill>
+            </a:ext>
+          </a:extLst>
+        </p:spPr>
+      </p:pic>
+      <p:sp>
+        <p:nvSpPr>
+          <p:cNvPr id="12" name="Rectangle: Rounded Corners 11">
+            <a:extLst>
+              <a:ext uri="{FF2B5EF4-FFF2-40B4-BE49-F238E27FC236}">
+                <a16:creationId xmlns:a16="http://schemas.microsoft.com/office/drawing/2014/main" id="{90F2725C-29DB-E159-F483-47BB2E481C1B}"/>
+              </a:ext>
+            </a:extLst>
+          </p:cNvPr>
+          <p:cNvSpPr/>
+          <p:nvPr/>
+        </p:nvSpPr>
+        <p:spPr>
+          <a:xfrm>
+            <a:off x="9682558" y="6286048"/>
+            <a:ext cx="2357042" cy="409737"/>
+          </a:xfrm>
+          <a:prstGeom prst="roundRect">
+            <a:avLst/>
+          </a:prstGeom>
+        </p:spPr>
+        <p:style>
+          <a:lnRef idx="2">
+            <a:schemeClr val="accent1">
+              <a:shade val="50000"/>
+            </a:schemeClr>
+          </a:lnRef>
+          <a:fillRef idx="1">
+            <a:schemeClr val="accent1"/>
+          </a:fillRef>
+          <a:effectRef idx="0">
+            <a:schemeClr val="accent1"/>
+          </a:effectRef>
+          <a:fontRef idx="minor">
+            <a:schemeClr val="lt1"/>
+          </a:fontRef>
+        </p:style>
+        <p:txBody>
+          <a:bodyPr rtlCol="0" anchor="ctr"/>
+          <a:lstStyle/>
+          <a:p>
+            <a:pPr algn="ctr"/>
+            <a:r>
+              <a:rPr lang="en-US" dirty="0" err="1"/>
+              <a:t>ArchitectureTrack</a:t>
+            </a:r>
+            <a:endParaRPr lang="en-BE" dirty="0"/>
+          </a:p>
+        </p:txBody>
+      </p:sp>
+      <p:sp>
+        <p:nvSpPr>
+          <p:cNvPr id="13" name="Rectangle 12">
+            <a:extLst>
+              <a:ext uri="{FF2B5EF4-FFF2-40B4-BE49-F238E27FC236}">
+                <a16:creationId xmlns:a16="http://schemas.microsoft.com/office/drawing/2014/main" id="{A1C71028-EB83-5D58-D2E2-A346C24327E2}"/>
+              </a:ext>
+            </a:extLst>
+          </p:cNvPr>
+          <p:cNvSpPr/>
+          <p:nvPr/>
+        </p:nvSpPr>
+        <p:spPr>
+          <a:xfrm>
+            <a:off x="2171413" y="6270021"/>
+            <a:ext cx="1846957" cy="441793"/>
+          </a:xfrm>
+          <a:prstGeom prst="rect">
+            <a:avLst/>
+          </a:prstGeom>
+        </p:spPr>
+        <p:style>
+          <a:lnRef idx="2">
+            <a:schemeClr val="accent4">
+              <a:shade val="50000"/>
+            </a:schemeClr>
+          </a:lnRef>
+          <a:fillRef idx="1">
+            <a:schemeClr val="accent4"/>
+          </a:fillRef>
+          <a:effectRef idx="0">
+            <a:schemeClr val="accent4"/>
+          </a:effectRef>
+          <a:fontRef idx="minor">
+            <a:schemeClr val="lt1"/>
+          </a:fontRef>
+        </p:style>
+        <p:txBody>
+          <a:bodyPr rtlCol="0" anchor="ctr"/>
+          <a:lstStyle/>
+          <a:p>
+            <a:pPr algn="ctr"/>
+            <a:r>
+              <a:rPr lang="fr-BE" dirty="0"/>
+              <a:t>Introduction</a:t>
             </a:r>
             <a:endParaRPr lang="en-BE" dirty="0"/>
           </a:p>
@@ -16007,7 +16255,7 @@
 </file>
 
 <file path=customXml/itemProps1.xml><?xml version="1.0" encoding="utf-8"?>
-<ds:datastoreItem xmlns:ds="http://schemas.openxmlformats.org/officeDocument/2006/customXml" ds:itemID="{80AEB8C7-15C9-4D65-9EE7-11A2CB838C5A}">
+<ds:datastoreItem xmlns:ds="http://schemas.openxmlformats.org/officeDocument/2006/customXml" ds:itemID="{F3B5C45F-B42D-4B35-918E-FAB452AC1D33}">
   <ds:schemaRefs>
     <ds:schemaRef ds:uri="http://schemas.microsoft.com/VisualStudio/2011/storyboarding/control"/>
   </ds:schemaRefs>
@@ -16015,7 +16263,7 @@
 </file>
 
 <file path=customXml/itemProps10.xml><?xml version="1.0" encoding="utf-8"?>
-<ds:datastoreItem xmlns:ds="http://schemas.openxmlformats.org/officeDocument/2006/customXml" ds:itemID="{83121EFB-4893-415B-B7BD-F940E893B2BD}">
+<ds:datastoreItem xmlns:ds="http://schemas.openxmlformats.org/officeDocument/2006/customXml" ds:itemID="{3E0AE290-3F40-4D57-BEC1-2DFB08CFF6EE}">
   <ds:schemaRefs>
     <ds:schemaRef ds:uri="http://schemas.microsoft.com/VisualStudio/2011/storyboarding/control"/>
   </ds:schemaRefs>
@@ -16023,7 +16271,7 @@
 </file>
 
 <file path=customXml/itemProps11.xml><?xml version="1.0" encoding="utf-8"?>
-<ds:datastoreItem xmlns:ds="http://schemas.openxmlformats.org/officeDocument/2006/customXml" ds:itemID="{304A3E77-6BB0-4BD7-B5E4-AB5CF752FAF0}">
+<ds:datastoreItem xmlns:ds="http://schemas.openxmlformats.org/officeDocument/2006/customXml" ds:itemID="{AE82AF60-7D53-4207-9587-6D7435FE6591}">
   <ds:schemaRefs>
     <ds:schemaRef ds:uri="http://schemas.microsoft.com/VisualStudio/2011/storyboarding/control"/>
   </ds:schemaRefs>
@@ -16031,6 +16279,30 @@
 </file>
 
 <file path=customXml/itemProps12.xml><?xml version="1.0" encoding="utf-8"?>
+<ds:datastoreItem xmlns:ds="http://schemas.openxmlformats.org/officeDocument/2006/customXml" ds:itemID="{9A3AC1E6-5FA1-4B35-8625-B10EEBA197FA}">
+  <ds:schemaRefs>
+    <ds:schemaRef ds:uri="http://schemas.microsoft.com/VisualStudio/2011/storyboarding/control"/>
+  </ds:schemaRefs>
+</ds:datastoreItem>
+</file>
+
+<file path=customXml/itemProps13.xml><?xml version="1.0" encoding="utf-8"?>
+<ds:datastoreItem xmlns:ds="http://schemas.openxmlformats.org/officeDocument/2006/customXml" ds:itemID="{6396B345-458C-4D49-ADAF-58E7F0B78595}">
+  <ds:schemaRefs>
+    <ds:schemaRef ds:uri="http://schemas.microsoft.com/VisualStudio/2011/storyboarding/control"/>
+  </ds:schemaRefs>
+</ds:datastoreItem>
+</file>
+
+<file path=customXml/itemProps14.xml><?xml version="1.0" encoding="utf-8"?>
+<ds:datastoreItem xmlns:ds="http://schemas.openxmlformats.org/officeDocument/2006/customXml" ds:itemID="{362CCD8F-16BE-4E1C-8763-6DE2F7BF903B}">
+  <ds:schemaRefs>
+    <ds:schemaRef ds:uri="http://schemas.microsoft.com/VisualStudio/2011/storyboarding/control"/>
+  </ds:schemaRefs>
+</ds:datastoreItem>
+</file>
+
+<file path=customXml/itemProps15.xml><?xml version="1.0" encoding="utf-8"?>
 <ds:datastoreItem xmlns:ds="http://schemas.openxmlformats.org/officeDocument/2006/customXml" ds:itemID="{892CC5F1-66C3-4A48-9A75-51CE1AFAE460}">
   <ds:schemaRefs>
     <ds:schemaRef ds:uri="http://schemas.microsoft.com/VisualStudio/2011/storyboarding/control"/>
@@ -16038,32 +16310,8 @@
 </ds:datastoreItem>
 </file>
 
-<file path=customXml/itemProps13.xml><?xml version="1.0" encoding="utf-8"?>
-<ds:datastoreItem xmlns:ds="http://schemas.openxmlformats.org/officeDocument/2006/customXml" ds:itemID="{90A47EB3-1020-4673-B114-E365143128B2}">
-  <ds:schemaRefs>
-    <ds:schemaRef ds:uri="http://schemas.microsoft.com/VisualStudio/2011/storyboarding/control"/>
-  </ds:schemaRefs>
-</ds:datastoreItem>
-</file>
-
-<file path=customXml/itemProps14.xml><?xml version="1.0" encoding="utf-8"?>
-<ds:datastoreItem xmlns:ds="http://schemas.openxmlformats.org/officeDocument/2006/customXml" ds:itemID="{9A3AC1E6-5FA1-4B35-8625-B10EEBA197FA}">
-  <ds:schemaRefs>
-    <ds:schemaRef ds:uri="http://schemas.microsoft.com/VisualStudio/2011/storyboarding/control"/>
-  </ds:schemaRefs>
-</ds:datastoreItem>
-</file>
-
-<file path=customXml/itemProps15.xml><?xml version="1.0" encoding="utf-8"?>
-<ds:datastoreItem xmlns:ds="http://schemas.openxmlformats.org/officeDocument/2006/customXml" ds:itemID="{F25BAA23-CA26-4303-8A25-F7FEF657A844}">
-  <ds:schemaRefs>
-    <ds:schemaRef ds:uri="http://schemas.microsoft.com/VisualStudio/2011/storyboarding/control"/>
-  </ds:schemaRefs>
-</ds:datastoreItem>
-</file>
-
 <file path=customXml/itemProps16.xml><?xml version="1.0" encoding="utf-8"?>
-<ds:datastoreItem xmlns:ds="http://schemas.openxmlformats.org/officeDocument/2006/customXml" ds:itemID="{F98221BE-25DF-49FC-A8E1-78B76E1D8EE3}">
+<ds:datastoreItem xmlns:ds="http://schemas.openxmlformats.org/officeDocument/2006/customXml" ds:itemID="{06305E1B-75D0-4A05-83DE-099EF7BB33C8}">
   <ds:schemaRefs>
     <ds:schemaRef ds:uri="http://schemas.microsoft.com/VisualStudio/2011/storyboarding/control"/>
   </ds:schemaRefs>
@@ -16071,7 +16319,7 @@
 </file>
 
 <file path=customXml/itemProps17.xml><?xml version="1.0" encoding="utf-8"?>
-<ds:datastoreItem xmlns:ds="http://schemas.openxmlformats.org/officeDocument/2006/customXml" ds:itemID="{06305E1B-75D0-4A05-83DE-099EF7BB33C8}">
+<ds:datastoreItem xmlns:ds="http://schemas.openxmlformats.org/officeDocument/2006/customXml" ds:itemID="{90A47EB3-1020-4673-B114-E365143128B2}">
   <ds:schemaRefs>
     <ds:schemaRef ds:uri="http://schemas.microsoft.com/VisualStudio/2011/storyboarding/control"/>
   </ds:schemaRefs>
@@ -16095,7 +16343,7 @@
 </file>
 
 <file path=customXml/itemProps3.xml><?xml version="1.0" encoding="utf-8"?>
-<ds:datastoreItem xmlns:ds="http://schemas.openxmlformats.org/officeDocument/2006/customXml" ds:itemID="{362CCD8F-16BE-4E1C-8763-6DE2F7BF903B}">
+<ds:datastoreItem xmlns:ds="http://schemas.openxmlformats.org/officeDocument/2006/customXml" ds:itemID="{F98221BE-25DF-49FC-A8E1-78B76E1D8EE3}">
   <ds:schemaRefs>
     <ds:schemaRef ds:uri="http://schemas.microsoft.com/VisualStudio/2011/storyboarding/control"/>
   </ds:schemaRefs>
@@ -16103,7 +16351,7 @@
 </file>
 
 <file path=customXml/itemProps4.xml><?xml version="1.0" encoding="utf-8"?>
-<ds:datastoreItem xmlns:ds="http://schemas.openxmlformats.org/officeDocument/2006/customXml" ds:itemID="{3E0AE290-3F40-4D57-BEC1-2DFB08CFF6EE}">
+<ds:datastoreItem xmlns:ds="http://schemas.openxmlformats.org/officeDocument/2006/customXml" ds:itemID="{80AEB8C7-15C9-4D65-9EE7-11A2CB838C5A}">
   <ds:schemaRefs>
     <ds:schemaRef ds:uri="http://schemas.microsoft.com/VisualStudio/2011/storyboarding/control"/>
   </ds:schemaRefs>
@@ -16111,6 +16359,22 @@
 </file>
 
 <file path=customXml/itemProps5.xml><?xml version="1.0" encoding="utf-8"?>
+<ds:datastoreItem xmlns:ds="http://schemas.openxmlformats.org/officeDocument/2006/customXml" ds:itemID="{3D81821A-B94A-4ED1-9FDE-0078334F7A1D}">
+  <ds:schemaRefs>
+    <ds:schemaRef ds:uri="http://schemas.microsoft.com/VisualStudio/2011/storyboarding/control"/>
+  </ds:schemaRefs>
+</ds:datastoreItem>
+</file>
+
+<file path=customXml/itemProps6.xml><?xml version="1.0" encoding="utf-8"?>
+<ds:datastoreItem xmlns:ds="http://schemas.openxmlformats.org/officeDocument/2006/customXml" ds:itemID="{304A3E77-6BB0-4BD7-B5E4-AB5CF752FAF0}">
+  <ds:schemaRefs>
+    <ds:schemaRef ds:uri="http://schemas.microsoft.com/VisualStudio/2011/storyboarding/control"/>
+  </ds:schemaRefs>
+</ds:datastoreItem>
+</file>
+
+<file path=customXml/itemProps7.xml><?xml version="1.0" encoding="utf-8"?>
 <ds:datastoreItem xmlns:ds="http://schemas.openxmlformats.org/officeDocument/2006/customXml" ds:itemID="{95AEF2F1-217F-4B25-AC3F-DA973FD6E801}">
   <ds:schemaRefs>
     <ds:schemaRef ds:uri="http://schemas.microsoft.com/VisualStudio/2011/storyboarding/control"/>
@@ -16118,24 +16382,8 @@
 </ds:datastoreItem>
 </file>
 
-<file path=customXml/itemProps6.xml><?xml version="1.0" encoding="utf-8"?>
-<ds:datastoreItem xmlns:ds="http://schemas.openxmlformats.org/officeDocument/2006/customXml" ds:itemID="{3D81821A-B94A-4ED1-9FDE-0078334F7A1D}">
-  <ds:schemaRefs>
-    <ds:schemaRef ds:uri="http://schemas.microsoft.com/VisualStudio/2011/storyboarding/control"/>
-  </ds:schemaRefs>
-</ds:datastoreItem>
-</file>
-
-<file path=customXml/itemProps7.xml><?xml version="1.0" encoding="utf-8"?>
-<ds:datastoreItem xmlns:ds="http://schemas.openxmlformats.org/officeDocument/2006/customXml" ds:itemID="{F3B5C45F-B42D-4B35-918E-FAB452AC1D33}">
-  <ds:schemaRefs>
-    <ds:schemaRef ds:uri="http://schemas.microsoft.com/VisualStudio/2011/storyboarding/control"/>
-  </ds:schemaRefs>
-</ds:datastoreItem>
-</file>
-
 <file path=customXml/itemProps8.xml><?xml version="1.0" encoding="utf-8"?>
-<ds:datastoreItem xmlns:ds="http://schemas.openxmlformats.org/officeDocument/2006/customXml" ds:itemID="{6396B345-458C-4D49-ADAF-58E7F0B78595}">
+<ds:datastoreItem xmlns:ds="http://schemas.openxmlformats.org/officeDocument/2006/customXml" ds:itemID="{F25BAA23-CA26-4303-8A25-F7FEF657A844}">
   <ds:schemaRefs>
     <ds:schemaRef ds:uri="http://schemas.microsoft.com/VisualStudio/2011/storyboarding/control"/>
   </ds:schemaRefs>
@@ -16143,7 +16391,7 @@
 </file>
 
 <file path=customXml/itemProps9.xml><?xml version="1.0" encoding="utf-8"?>
-<ds:datastoreItem xmlns:ds="http://schemas.openxmlformats.org/officeDocument/2006/customXml" ds:itemID="{AE82AF60-7D53-4207-9587-6D7435FE6591}">
+<ds:datastoreItem xmlns:ds="http://schemas.openxmlformats.org/officeDocument/2006/customXml" ds:itemID="{83121EFB-4893-415B-B7BD-F940E893B2BD}">
   <ds:schemaRefs>
     <ds:schemaRef ds:uri="http://schemas.microsoft.com/VisualStudio/2011/storyboarding/control"/>
   </ds:schemaRefs>
